--- a/koreatech-db/weeks/02주차_관계형_데이터베이스_기초.pptx
+++ b/koreatech-db/weeks/02주차_관계형_데이터베이스_기초.pptx
@@ -3931,9 +3931,9 @@
                 <a:solidFill>
                   <a:srgbClr val="7A869C"/>
                 </a:solidFill>
-                <a:latin typeface="나눔고딕코딩"/>
-                <a:ea typeface="나눔고딕코딩"/>
-                <a:cs typeface="나눔고딕코딩"/>
+                <a:latin typeface="D2Coding"/>
+                <a:ea typeface="D2Coding"/>
+                <a:cs typeface="D2Coding"/>
               </a:rPr>
               <a:t>1</a:t>
             </a:r>
@@ -3949,9 +3949,9 @@
                 <a:solidFill>
                   <a:srgbClr val="7A869C"/>
                 </a:solidFill>
-                <a:latin typeface="나눔고딕코딩"/>
-                <a:ea typeface="나눔고딕코딩"/>
-                <a:cs typeface="나눔고딕코딩"/>
+                <a:latin typeface="D2Coding"/>
+                <a:ea typeface="D2Coding"/>
+                <a:cs typeface="D2Coding"/>
               </a:rPr>
               <a:t>2</a:t>
             </a:r>
@@ -3967,9 +3967,9 @@
                 <a:solidFill>
                   <a:srgbClr val="7A869C"/>
                 </a:solidFill>
-                <a:latin typeface="나눔고딕코딩"/>
-                <a:ea typeface="나눔고딕코딩"/>
-                <a:cs typeface="나눔고딕코딩"/>
+                <a:latin typeface="D2Coding"/>
+                <a:ea typeface="D2Coding"/>
+                <a:cs typeface="D2Coding"/>
               </a:rPr>
               <a:t>3</a:t>
             </a:r>
@@ -3985,9 +3985,9 @@
                 <a:solidFill>
                   <a:srgbClr val="7A869C"/>
                 </a:solidFill>
-                <a:latin typeface="나눔고딕코딩"/>
-                <a:ea typeface="나눔고딕코딩"/>
-                <a:cs typeface="나눔고딕코딩"/>
+                <a:latin typeface="D2Coding"/>
+                <a:ea typeface="D2Coding"/>
+                <a:cs typeface="D2Coding"/>
               </a:rPr>
               <a:t>4</a:t>
             </a:r>
@@ -4003,9 +4003,9 @@
                 <a:solidFill>
                   <a:srgbClr val="7A869C"/>
                 </a:solidFill>
-                <a:latin typeface="나눔고딕코딩"/>
-                <a:ea typeface="나눔고딕코딩"/>
-                <a:cs typeface="나눔고딕코딩"/>
+                <a:latin typeface="D2Coding"/>
+                <a:ea typeface="D2Coding"/>
+                <a:cs typeface="D2Coding"/>
               </a:rPr>
               <a:t>5</a:t>
             </a:r>
@@ -4021,9 +4021,9 @@
                 <a:solidFill>
                   <a:srgbClr val="7A869C"/>
                 </a:solidFill>
-                <a:latin typeface="나눔고딕코딩"/>
-                <a:ea typeface="나눔고딕코딩"/>
-                <a:cs typeface="나눔고딕코딩"/>
+                <a:latin typeface="D2Coding"/>
+                <a:ea typeface="D2Coding"/>
+                <a:cs typeface="D2Coding"/>
               </a:rPr>
               <a:t>6</a:t>
             </a:r>
@@ -4039,9 +4039,9 @@
                 <a:solidFill>
                   <a:srgbClr val="7A869C"/>
                 </a:solidFill>
-                <a:latin typeface="나눔고딕코딩"/>
-                <a:ea typeface="나눔고딕코딩"/>
-                <a:cs typeface="나눔고딕코딩"/>
+                <a:latin typeface="D2Coding"/>
+                <a:ea typeface="D2Coding"/>
+                <a:cs typeface="D2Coding"/>
               </a:rPr>
               <a:t>7</a:t>
             </a:r>
@@ -4057,9 +4057,9 @@
                 <a:solidFill>
                   <a:srgbClr val="7A869C"/>
                 </a:solidFill>
-                <a:latin typeface="나눔고딕코딩"/>
-                <a:ea typeface="나눔고딕코딩"/>
-                <a:cs typeface="나눔고딕코딩"/>
+                <a:latin typeface="D2Coding"/>
+                <a:ea typeface="D2Coding"/>
+                <a:cs typeface="D2Coding"/>
               </a:rPr>
               <a:t>8</a:t>
             </a:r>
@@ -4075,9 +4075,9 @@
                 <a:solidFill>
                   <a:srgbClr val="7A869C"/>
                 </a:solidFill>
-                <a:latin typeface="나눔고딕코딩"/>
-                <a:ea typeface="나눔고딕코딩"/>
-                <a:cs typeface="나눔고딕코딩"/>
+                <a:latin typeface="D2Coding"/>
+                <a:ea typeface="D2Coding"/>
+                <a:cs typeface="D2Coding"/>
               </a:rPr>
               <a:t>9</a:t>
             </a:r>
@@ -4093,9 +4093,9 @@
                 <a:solidFill>
                   <a:srgbClr val="7A869C"/>
                 </a:solidFill>
-                <a:latin typeface="나눔고딕코딩"/>
-                <a:ea typeface="나눔고딕코딩"/>
-                <a:cs typeface="나눔고딕코딩"/>
+                <a:latin typeface="D2Coding"/>
+                <a:ea typeface="D2Coding"/>
+                <a:cs typeface="D2Coding"/>
               </a:rPr>
               <a:t>10</a:t>
             </a:r>
@@ -4134,9 +4134,9 @@
                 <a:solidFill>
                   <a:srgbClr val="E6EAF2"/>
                 </a:solidFill>
-                <a:latin typeface="나눔고딕코딩"/>
-                <a:ea typeface="나눔고딕코딩"/>
-                <a:cs typeface="나눔고딕코딩"/>
+                <a:latin typeface="D2Coding"/>
+                <a:ea typeface="D2Coding"/>
+                <a:cs typeface="D2Coding"/>
               </a:rPr>
               <a:t>order_items(order_id, prod_id, qty, unit_price)</a:t>
             </a:r>
@@ -4152,9 +4152,9 @@
                 <a:solidFill>
                   <a:srgbClr val="E6EAF2"/>
                 </a:solidFill>
-                <a:latin typeface="나눔고딕코딩"/>
-                <a:ea typeface="나눔고딕코딩"/>
-                <a:cs typeface="나눔고딕코딩"/>
+                <a:latin typeface="D2Coding"/>
+                <a:ea typeface="D2Coding"/>
+                <a:cs typeface="D2Coding"/>
               </a:rPr>
               <a:t>  · 한 주문 안에서 같은 상품은 한 행뿐</a:t>
             </a:r>
@@ -4170,9 +4170,9 @@
                 <a:solidFill>
                   <a:srgbClr val="E6EAF2"/>
                 </a:solidFill>
-                <a:latin typeface="나눔고딕코딩"/>
-                <a:ea typeface="나눔고딕코딩"/>
-                <a:cs typeface="나눔고딕코딩"/>
+                <a:latin typeface="D2Coding"/>
+                <a:ea typeface="D2Coding"/>
+                <a:cs typeface="D2Coding"/>
               </a:rPr>
               <a:t>  · (order_id, prod_id) 둘을 묶어야 행이 식별됨 = 복합 기본키</a:t>
             </a:r>
@@ -4188,9 +4188,9 @@
                 <a:solidFill>
                   <a:srgbClr val="E6EAF2"/>
                 </a:solidFill>
-                <a:latin typeface="나눔고딕코딩"/>
-                <a:ea typeface="나눔고딕코딩"/>
-                <a:cs typeface="나눔고딕코딩"/>
+                <a:latin typeface="D2Coding"/>
+                <a:ea typeface="D2Coding"/>
+                <a:cs typeface="D2Coding"/>
               </a:rPr>
               <a:t/>
             </a:r>
@@ -4206,9 +4206,9 @@
                 <a:solidFill>
                   <a:srgbClr val="E6EAF2"/>
                 </a:solidFill>
-                <a:latin typeface="나눔고딕코딩"/>
-                <a:ea typeface="나눔고딕코딩"/>
-                <a:cs typeface="나눔고딕코딩"/>
+                <a:latin typeface="D2Coding"/>
+                <a:ea typeface="D2Coding"/>
+                <a:cs typeface="D2Coding"/>
               </a:rPr>
               <a:t>orders(order_id, cust_id, emp_id, order_date, status)</a:t>
             </a:r>
@@ -4224,9 +4224,9 @@
                 <a:solidFill>
                   <a:srgbClr val="E6EAF2"/>
                 </a:solidFill>
-                <a:latin typeface="나눔고딕코딩"/>
-                <a:ea typeface="나눔고딕코딩"/>
-                <a:cs typeface="나눔고딕코딩"/>
+                <a:latin typeface="D2Coding"/>
+                <a:ea typeface="D2Coding"/>
+                <a:cs typeface="D2Coding"/>
               </a:rPr>
               <a:t>  · cust_id → customers(cust_id) 참조 = 외래키</a:t>
             </a:r>
@@ -4242,9 +4242,9 @@
                 <a:solidFill>
                   <a:srgbClr val="E6EAF2"/>
                 </a:solidFill>
-                <a:latin typeface="나눔고딕코딩"/>
-                <a:ea typeface="나눔고딕코딩"/>
-                <a:cs typeface="나눔고딕코딩"/>
+                <a:latin typeface="D2Coding"/>
+                <a:ea typeface="D2Coding"/>
+                <a:cs typeface="D2Coding"/>
               </a:rPr>
               <a:t>  · emp_id  → employees(emp_id)  참조 = 외래키 (온라인 주문은 NULL)</a:t>
             </a:r>
@@ -4260,9 +4260,9 @@
                 <a:solidFill>
                   <a:srgbClr val="E6EAF2"/>
                 </a:solidFill>
-                <a:latin typeface="나눔고딕코딩"/>
-                <a:ea typeface="나눔고딕코딩"/>
-                <a:cs typeface="나눔고딕코딩"/>
+                <a:latin typeface="D2Coding"/>
+                <a:ea typeface="D2Coding"/>
+                <a:cs typeface="D2Coding"/>
               </a:rPr>
               <a:t/>
             </a:r>
@@ -4278,9 +4278,9 @@
                 <a:solidFill>
                   <a:srgbClr val="E6EAF2"/>
                 </a:solidFill>
-                <a:latin typeface="나눔고딕코딩"/>
-                <a:ea typeface="나눔고딕코딩"/>
-                <a:cs typeface="나눔고딕코딩"/>
+                <a:latin typeface="D2Coding"/>
+                <a:ea typeface="D2Coding"/>
+                <a:cs typeface="D2Coding"/>
               </a:rPr>
               <a:t>employees(emp_id, ..., manager_id)</a:t>
             </a:r>
@@ -4296,9 +4296,9 @@
                 <a:solidFill>
                   <a:srgbClr val="E6EAF2"/>
                 </a:solidFill>
-                <a:latin typeface="나눔고딕코딩"/>
-                <a:ea typeface="나눔고딕코딩"/>
-                <a:cs typeface="나눔고딕코딩"/>
+                <a:latin typeface="D2Coding"/>
+                <a:ea typeface="D2Coding"/>
+                <a:cs typeface="D2Coding"/>
               </a:rPr>
               <a:t>  · manager_id → employees(emp_id) 참조 = 자기 테이블을 참조하는 외래키</a:t>
             </a:r>
@@ -6063,9 +6063,9 @@
                 <a:solidFill>
                   <a:srgbClr val="7A869C"/>
                 </a:solidFill>
-                <a:latin typeface="나눔고딕코딩"/>
-                <a:ea typeface="나눔고딕코딩"/>
-                <a:cs typeface="나눔고딕코딩"/>
+                <a:latin typeface="D2Coding"/>
+                <a:ea typeface="D2Coding"/>
+                <a:cs typeface="D2Coding"/>
               </a:rPr>
               <a:t>1</a:t>
             </a:r>
@@ -6081,9 +6081,9 @@
                 <a:solidFill>
                   <a:srgbClr val="7A869C"/>
                 </a:solidFill>
-                <a:latin typeface="나눔고딕코딩"/>
-                <a:ea typeface="나눔고딕코딩"/>
-                <a:cs typeface="나눔고딕코딩"/>
+                <a:latin typeface="D2Coding"/>
+                <a:ea typeface="D2Coding"/>
+                <a:cs typeface="D2Coding"/>
               </a:rPr>
               <a:t>2</a:t>
             </a:r>
@@ -6099,9 +6099,9 @@
                 <a:solidFill>
                   <a:srgbClr val="7A869C"/>
                 </a:solidFill>
-                <a:latin typeface="나눔고딕코딩"/>
-                <a:ea typeface="나눔고딕코딩"/>
-                <a:cs typeface="나눔고딕코딩"/>
+                <a:latin typeface="D2Coding"/>
+                <a:ea typeface="D2Coding"/>
+                <a:cs typeface="D2Coding"/>
               </a:rPr>
               <a:t>3</a:t>
             </a:r>
@@ -6117,9 +6117,9 @@
                 <a:solidFill>
                   <a:srgbClr val="7A869C"/>
                 </a:solidFill>
-                <a:latin typeface="나눔고딕코딩"/>
-                <a:ea typeface="나눔고딕코딩"/>
-                <a:cs typeface="나눔고딕코딩"/>
+                <a:latin typeface="D2Coding"/>
+                <a:ea typeface="D2Coding"/>
+                <a:cs typeface="D2Coding"/>
               </a:rPr>
               <a:t>4</a:t>
             </a:r>
@@ -6135,9 +6135,9 @@
                 <a:solidFill>
                   <a:srgbClr val="7A869C"/>
                 </a:solidFill>
-                <a:latin typeface="나눔고딕코딩"/>
-                <a:ea typeface="나눔고딕코딩"/>
-                <a:cs typeface="나눔고딕코딩"/>
+                <a:latin typeface="D2Coding"/>
+                <a:ea typeface="D2Coding"/>
+                <a:cs typeface="D2Coding"/>
               </a:rPr>
               <a:t>5</a:t>
             </a:r>
@@ -6153,9 +6153,9 @@
                 <a:solidFill>
                   <a:srgbClr val="7A869C"/>
                 </a:solidFill>
-                <a:latin typeface="나눔고딕코딩"/>
-                <a:ea typeface="나눔고딕코딩"/>
-                <a:cs typeface="나눔고딕코딩"/>
+                <a:latin typeface="D2Coding"/>
+                <a:ea typeface="D2Coding"/>
+                <a:cs typeface="D2Coding"/>
               </a:rPr>
               <a:t>6</a:t>
             </a:r>
@@ -6171,9 +6171,9 @@
                 <a:solidFill>
                   <a:srgbClr val="7A869C"/>
                 </a:solidFill>
-                <a:latin typeface="나눔고딕코딩"/>
-                <a:ea typeface="나눔고딕코딩"/>
-                <a:cs typeface="나눔고딕코딩"/>
+                <a:latin typeface="D2Coding"/>
+                <a:ea typeface="D2Coding"/>
+                <a:cs typeface="D2Coding"/>
               </a:rPr>
               <a:t>7</a:t>
             </a:r>
@@ -6189,9 +6189,9 @@
                 <a:solidFill>
                   <a:srgbClr val="7A869C"/>
                 </a:solidFill>
-                <a:latin typeface="나눔고딕코딩"/>
-                <a:ea typeface="나눔고딕코딩"/>
-                <a:cs typeface="나눔고딕코딩"/>
+                <a:latin typeface="D2Coding"/>
+                <a:ea typeface="D2Coding"/>
+                <a:cs typeface="D2Coding"/>
               </a:rPr>
               <a:t>8</a:t>
             </a:r>
@@ -6207,9 +6207,9 @@
                 <a:solidFill>
                   <a:srgbClr val="7A869C"/>
                 </a:solidFill>
-                <a:latin typeface="나눔고딕코딩"/>
-                <a:ea typeface="나눔고딕코딩"/>
-                <a:cs typeface="나눔고딕코딩"/>
+                <a:latin typeface="D2Coding"/>
+                <a:ea typeface="D2Coding"/>
+                <a:cs typeface="D2Coding"/>
               </a:rPr>
               <a:t>9</a:t>
             </a:r>
@@ -6225,9 +6225,9 @@
                 <a:solidFill>
                   <a:srgbClr val="7A869C"/>
                 </a:solidFill>
-                <a:latin typeface="나눔고딕코딩"/>
-                <a:ea typeface="나눔고딕코딩"/>
-                <a:cs typeface="나눔고딕코딩"/>
+                <a:latin typeface="D2Coding"/>
+                <a:ea typeface="D2Coding"/>
+                <a:cs typeface="D2Coding"/>
               </a:rPr>
               <a:t>10</a:t>
             </a:r>
@@ -6243,9 +6243,9 @@
                 <a:solidFill>
                   <a:srgbClr val="7A869C"/>
                 </a:solidFill>
-                <a:latin typeface="나눔고딕코딩"/>
-                <a:ea typeface="나눔고딕코딩"/>
-                <a:cs typeface="나눔고딕코딩"/>
+                <a:latin typeface="D2Coding"/>
+                <a:ea typeface="D2Coding"/>
+                <a:cs typeface="D2Coding"/>
               </a:rPr>
               <a:t>11</a:t>
             </a:r>
@@ -6261,9 +6261,9 @@
                 <a:solidFill>
                   <a:srgbClr val="7A869C"/>
                 </a:solidFill>
-                <a:latin typeface="나눔고딕코딩"/>
-                <a:ea typeface="나눔고딕코딩"/>
-                <a:cs typeface="나눔고딕코딩"/>
+                <a:latin typeface="D2Coding"/>
+                <a:ea typeface="D2Coding"/>
+                <a:cs typeface="D2Coding"/>
               </a:rPr>
               <a:t>12</a:t>
             </a:r>
@@ -6791,9 +6791,9 @@
                 <a:solidFill>
                   <a:srgbClr val="7A869C"/>
                 </a:solidFill>
-                <a:latin typeface="나눔고딕코딩"/>
-                <a:ea typeface="나눔고딕코딩"/>
-                <a:cs typeface="나눔고딕코딩"/>
+                <a:latin typeface="D2Coding"/>
+                <a:ea typeface="D2Coding"/>
+                <a:cs typeface="D2Coding"/>
               </a:rPr>
               <a:t>1</a:t>
             </a:r>
@@ -6809,9 +6809,9 @@
                 <a:solidFill>
                   <a:srgbClr val="7A869C"/>
                 </a:solidFill>
-                <a:latin typeface="나눔고딕코딩"/>
-                <a:ea typeface="나눔고딕코딩"/>
-                <a:cs typeface="나눔고딕코딩"/>
+                <a:latin typeface="D2Coding"/>
+                <a:ea typeface="D2Coding"/>
+                <a:cs typeface="D2Coding"/>
               </a:rPr>
               <a:t>2</a:t>
             </a:r>
@@ -6827,9 +6827,9 @@
                 <a:solidFill>
                   <a:srgbClr val="7A869C"/>
                 </a:solidFill>
-                <a:latin typeface="나눔고딕코딩"/>
-                <a:ea typeface="나눔고딕코딩"/>
-                <a:cs typeface="나눔고딕코딩"/>
+                <a:latin typeface="D2Coding"/>
+                <a:ea typeface="D2Coding"/>
+                <a:cs typeface="D2Coding"/>
               </a:rPr>
               <a:t>3</a:t>
             </a:r>
@@ -6845,9 +6845,9 @@
                 <a:solidFill>
                   <a:srgbClr val="7A869C"/>
                 </a:solidFill>
-                <a:latin typeface="나눔고딕코딩"/>
-                <a:ea typeface="나눔고딕코딩"/>
-                <a:cs typeface="나눔고딕코딩"/>
+                <a:latin typeface="D2Coding"/>
+                <a:ea typeface="D2Coding"/>
+                <a:cs typeface="D2Coding"/>
               </a:rPr>
               <a:t>4</a:t>
             </a:r>
@@ -6863,9 +6863,9 @@
                 <a:solidFill>
                   <a:srgbClr val="7A869C"/>
                 </a:solidFill>
-                <a:latin typeface="나눔고딕코딩"/>
-                <a:ea typeface="나눔고딕코딩"/>
-                <a:cs typeface="나눔고딕코딩"/>
+                <a:latin typeface="D2Coding"/>
+                <a:ea typeface="D2Coding"/>
+                <a:cs typeface="D2Coding"/>
               </a:rPr>
               <a:t>5</a:t>
             </a:r>
@@ -6881,9 +6881,9 @@
                 <a:solidFill>
                   <a:srgbClr val="7A869C"/>
                 </a:solidFill>
-                <a:latin typeface="나눔고딕코딩"/>
-                <a:ea typeface="나눔고딕코딩"/>
-                <a:cs typeface="나눔고딕코딩"/>
+                <a:latin typeface="D2Coding"/>
+                <a:ea typeface="D2Coding"/>
+                <a:cs typeface="D2Coding"/>
               </a:rPr>
               <a:t>6</a:t>
             </a:r>
@@ -6899,9 +6899,9 @@
                 <a:solidFill>
                   <a:srgbClr val="7A869C"/>
                 </a:solidFill>
-                <a:latin typeface="나눔고딕코딩"/>
-                <a:ea typeface="나눔고딕코딩"/>
-                <a:cs typeface="나눔고딕코딩"/>
+                <a:latin typeface="D2Coding"/>
+                <a:ea typeface="D2Coding"/>
+                <a:cs typeface="D2Coding"/>
               </a:rPr>
               <a:t>7</a:t>
             </a:r>
@@ -6917,9 +6917,9 @@
                 <a:solidFill>
                   <a:srgbClr val="7A869C"/>
                 </a:solidFill>
-                <a:latin typeface="나눔고딕코딩"/>
-                <a:ea typeface="나눔고딕코딩"/>
-                <a:cs typeface="나눔고딕코딩"/>
+                <a:latin typeface="D2Coding"/>
+                <a:ea typeface="D2Coding"/>
+                <a:cs typeface="D2Coding"/>
               </a:rPr>
               <a:t>8</a:t>
             </a:r>
@@ -6935,9 +6935,9 @@
                 <a:solidFill>
                   <a:srgbClr val="7A869C"/>
                 </a:solidFill>
-                <a:latin typeface="나눔고딕코딩"/>
-                <a:ea typeface="나눔고딕코딩"/>
-                <a:cs typeface="나눔고딕코딩"/>
+                <a:latin typeface="D2Coding"/>
+                <a:ea typeface="D2Coding"/>
+                <a:cs typeface="D2Coding"/>
               </a:rPr>
               <a:t>9</a:t>
             </a:r>
@@ -6953,9 +6953,9 @@
                 <a:solidFill>
                   <a:srgbClr val="7A869C"/>
                 </a:solidFill>
-                <a:latin typeface="나눔고딕코딩"/>
-                <a:ea typeface="나눔고딕코딩"/>
-                <a:cs typeface="나눔고딕코딩"/>
+                <a:latin typeface="D2Coding"/>
+                <a:ea typeface="D2Coding"/>
+                <a:cs typeface="D2Coding"/>
               </a:rPr>
               <a:t>10</a:t>
             </a:r>
@@ -6971,9 +6971,9 @@
                 <a:solidFill>
                   <a:srgbClr val="7A869C"/>
                 </a:solidFill>
-                <a:latin typeface="나눔고딕코딩"/>
-                <a:ea typeface="나눔고딕코딩"/>
-                <a:cs typeface="나눔고딕코딩"/>
+                <a:latin typeface="D2Coding"/>
+                <a:ea typeface="D2Coding"/>
+                <a:cs typeface="D2Coding"/>
               </a:rPr>
               <a:t>11</a:t>
             </a:r>
@@ -6989,9 +6989,9 @@
                 <a:solidFill>
                   <a:srgbClr val="7A869C"/>
                 </a:solidFill>
-                <a:latin typeface="나눔고딕코딩"/>
-                <a:ea typeface="나눔고딕코딩"/>
-                <a:cs typeface="나눔고딕코딩"/>
+                <a:latin typeface="D2Coding"/>
+                <a:ea typeface="D2Coding"/>
+                <a:cs typeface="D2Coding"/>
               </a:rPr>
               <a:t>12</a:t>
             </a:r>
@@ -7007,9 +7007,9 @@
                 <a:solidFill>
                   <a:srgbClr val="7A869C"/>
                 </a:solidFill>
-                <a:latin typeface="나눔고딕코딩"/>
-                <a:ea typeface="나눔고딕코딩"/>
-                <a:cs typeface="나눔고딕코딩"/>
+                <a:latin typeface="D2Coding"/>
+                <a:ea typeface="D2Coding"/>
+                <a:cs typeface="D2Coding"/>
               </a:rPr>
               <a:t>13</a:t>
             </a:r>
@@ -8495,9 +8495,9 @@
                 <a:solidFill>
                   <a:srgbClr val="7A869C"/>
                 </a:solidFill>
-                <a:latin typeface="나눔고딕코딩"/>
-                <a:ea typeface="나눔고딕코딩"/>
-                <a:cs typeface="나눔고딕코딩"/>
+                <a:latin typeface="D2Coding"/>
+                <a:ea typeface="D2Coding"/>
+                <a:cs typeface="D2Coding"/>
               </a:rPr>
               <a:t>1</a:t>
             </a:r>
@@ -8513,9 +8513,9 @@
                 <a:solidFill>
                   <a:srgbClr val="7A869C"/>
                 </a:solidFill>
-                <a:latin typeface="나눔고딕코딩"/>
-                <a:ea typeface="나눔고딕코딩"/>
-                <a:cs typeface="나눔고딕코딩"/>
+                <a:latin typeface="D2Coding"/>
+                <a:ea typeface="D2Coding"/>
+                <a:cs typeface="D2Coding"/>
               </a:rPr>
               <a:t>2</a:t>
             </a:r>
@@ -8531,9 +8531,9 @@
                 <a:solidFill>
                   <a:srgbClr val="7A869C"/>
                 </a:solidFill>
-                <a:latin typeface="나눔고딕코딩"/>
-                <a:ea typeface="나눔고딕코딩"/>
-                <a:cs typeface="나눔고딕코딩"/>
+                <a:latin typeface="D2Coding"/>
+                <a:ea typeface="D2Coding"/>
+                <a:cs typeface="D2Coding"/>
               </a:rPr>
               <a:t>3</a:t>
             </a:r>
@@ -8549,9 +8549,9 @@
                 <a:solidFill>
                   <a:srgbClr val="7A869C"/>
                 </a:solidFill>
-                <a:latin typeface="나눔고딕코딩"/>
-                <a:ea typeface="나눔고딕코딩"/>
-                <a:cs typeface="나눔고딕코딩"/>
+                <a:latin typeface="D2Coding"/>
+                <a:ea typeface="D2Coding"/>
+                <a:cs typeface="D2Coding"/>
               </a:rPr>
               <a:t>4</a:t>
             </a:r>
@@ -8567,9 +8567,9 @@
                 <a:solidFill>
                   <a:srgbClr val="7A869C"/>
                 </a:solidFill>
-                <a:latin typeface="나눔고딕코딩"/>
-                <a:ea typeface="나눔고딕코딩"/>
-                <a:cs typeface="나눔고딕코딩"/>
+                <a:latin typeface="D2Coding"/>
+                <a:ea typeface="D2Coding"/>
+                <a:cs typeface="D2Coding"/>
               </a:rPr>
               <a:t>5</a:t>
             </a:r>
@@ -8585,9 +8585,9 @@
                 <a:solidFill>
                   <a:srgbClr val="7A869C"/>
                 </a:solidFill>
-                <a:latin typeface="나눔고딕코딩"/>
-                <a:ea typeface="나눔고딕코딩"/>
-                <a:cs typeface="나눔고딕코딩"/>
+                <a:latin typeface="D2Coding"/>
+                <a:ea typeface="D2Coding"/>
+                <a:cs typeface="D2Coding"/>
               </a:rPr>
               <a:t>6</a:t>
             </a:r>
@@ -8603,9 +8603,9 @@
                 <a:solidFill>
                   <a:srgbClr val="7A869C"/>
                 </a:solidFill>
-                <a:latin typeface="나눔고딕코딩"/>
-                <a:ea typeface="나눔고딕코딩"/>
-                <a:cs typeface="나눔고딕코딩"/>
+                <a:latin typeface="D2Coding"/>
+                <a:ea typeface="D2Coding"/>
+                <a:cs typeface="D2Coding"/>
               </a:rPr>
               <a:t>7</a:t>
             </a:r>
@@ -8621,9 +8621,9 @@
                 <a:solidFill>
                   <a:srgbClr val="7A869C"/>
                 </a:solidFill>
-                <a:latin typeface="나눔고딕코딩"/>
-                <a:ea typeface="나눔고딕코딩"/>
-                <a:cs typeface="나눔고딕코딩"/>
+                <a:latin typeface="D2Coding"/>
+                <a:ea typeface="D2Coding"/>
+                <a:cs typeface="D2Coding"/>
               </a:rPr>
               <a:t>8</a:t>
             </a:r>
@@ -8639,9 +8639,9 @@
                 <a:solidFill>
                   <a:srgbClr val="7A869C"/>
                 </a:solidFill>
-                <a:latin typeface="나눔고딕코딩"/>
-                <a:ea typeface="나눔고딕코딩"/>
-                <a:cs typeface="나눔고딕코딩"/>
+                <a:latin typeface="D2Coding"/>
+                <a:ea typeface="D2Coding"/>
+                <a:cs typeface="D2Coding"/>
               </a:rPr>
               <a:t>9</a:t>
             </a:r>
@@ -8657,9 +8657,9 @@
                 <a:solidFill>
                   <a:srgbClr val="7A869C"/>
                 </a:solidFill>
-                <a:latin typeface="나눔고딕코딩"/>
-                <a:ea typeface="나눔고딕코딩"/>
-                <a:cs typeface="나눔고딕코딩"/>
+                <a:latin typeface="D2Coding"/>
+                <a:ea typeface="D2Coding"/>
+                <a:cs typeface="D2Coding"/>
               </a:rPr>
               <a:t>10</a:t>
             </a:r>
@@ -8675,9 +8675,9 @@
                 <a:solidFill>
                   <a:srgbClr val="7A869C"/>
                 </a:solidFill>
-                <a:latin typeface="나눔고딕코딩"/>
-                <a:ea typeface="나눔고딕코딩"/>
-                <a:cs typeface="나눔고딕코딩"/>
+                <a:latin typeface="D2Coding"/>
+                <a:ea typeface="D2Coding"/>
+                <a:cs typeface="D2Coding"/>
               </a:rPr>
               <a:t>11</a:t>
             </a:r>
@@ -10691,9 +10691,9 @@
                 <a:solidFill>
                   <a:srgbClr val="7A869C"/>
                 </a:solidFill>
-                <a:latin typeface="나눔고딕코딩"/>
-                <a:ea typeface="나눔고딕코딩"/>
-                <a:cs typeface="나눔고딕코딩"/>
+                <a:latin typeface="D2Coding"/>
+                <a:ea typeface="D2Coding"/>
+                <a:cs typeface="D2Coding"/>
               </a:rPr>
               <a:t>1</a:t>
             </a:r>
@@ -10709,9 +10709,9 @@
                 <a:solidFill>
                   <a:srgbClr val="7A869C"/>
                 </a:solidFill>
-                <a:latin typeface="나눔고딕코딩"/>
-                <a:ea typeface="나눔고딕코딩"/>
-                <a:cs typeface="나눔고딕코딩"/>
+                <a:latin typeface="D2Coding"/>
+                <a:ea typeface="D2Coding"/>
+                <a:cs typeface="D2Coding"/>
               </a:rPr>
               <a:t>2</a:t>
             </a:r>
@@ -10727,9 +10727,9 @@
                 <a:solidFill>
                   <a:srgbClr val="7A869C"/>
                 </a:solidFill>
-                <a:latin typeface="나눔고딕코딩"/>
-                <a:ea typeface="나눔고딕코딩"/>
-                <a:cs typeface="나눔고딕코딩"/>
+                <a:latin typeface="D2Coding"/>
+                <a:ea typeface="D2Coding"/>
+                <a:cs typeface="D2Coding"/>
               </a:rPr>
               <a:t>3</a:t>
             </a:r>
@@ -10745,9 +10745,9 @@
                 <a:solidFill>
                   <a:srgbClr val="7A869C"/>
                 </a:solidFill>
-                <a:latin typeface="나눔고딕코딩"/>
-                <a:ea typeface="나눔고딕코딩"/>
-                <a:cs typeface="나눔고딕코딩"/>
+                <a:latin typeface="D2Coding"/>
+                <a:ea typeface="D2Coding"/>
+                <a:cs typeface="D2Coding"/>
               </a:rPr>
               <a:t>4</a:t>
             </a:r>
@@ -10763,9 +10763,9 @@
                 <a:solidFill>
                   <a:srgbClr val="7A869C"/>
                 </a:solidFill>
-                <a:latin typeface="나눔고딕코딩"/>
-                <a:ea typeface="나눔고딕코딩"/>
-                <a:cs typeface="나눔고딕코딩"/>
+                <a:latin typeface="D2Coding"/>
+                <a:ea typeface="D2Coding"/>
+                <a:cs typeface="D2Coding"/>
               </a:rPr>
               <a:t>5</a:t>
             </a:r>
@@ -10781,9 +10781,9 @@
                 <a:solidFill>
                   <a:srgbClr val="7A869C"/>
                 </a:solidFill>
-                <a:latin typeface="나눔고딕코딩"/>
-                <a:ea typeface="나눔고딕코딩"/>
-                <a:cs typeface="나눔고딕코딩"/>
+                <a:latin typeface="D2Coding"/>
+                <a:ea typeface="D2Coding"/>
+                <a:cs typeface="D2Coding"/>
               </a:rPr>
               <a:t>6</a:t>
             </a:r>
@@ -10799,9 +10799,9 @@
                 <a:solidFill>
                   <a:srgbClr val="7A869C"/>
                 </a:solidFill>
-                <a:latin typeface="나눔고딕코딩"/>
-                <a:ea typeface="나눔고딕코딩"/>
-                <a:cs typeface="나눔고딕코딩"/>
+                <a:latin typeface="D2Coding"/>
+                <a:ea typeface="D2Coding"/>
+                <a:cs typeface="D2Coding"/>
               </a:rPr>
               <a:t>7</a:t>
             </a:r>
@@ -10817,9 +10817,9 @@
                 <a:solidFill>
                   <a:srgbClr val="7A869C"/>
                 </a:solidFill>
-                <a:latin typeface="나눔고딕코딩"/>
-                <a:ea typeface="나눔고딕코딩"/>
-                <a:cs typeface="나눔고딕코딩"/>
+                <a:latin typeface="D2Coding"/>
+                <a:ea typeface="D2Coding"/>
+                <a:cs typeface="D2Coding"/>
               </a:rPr>
               <a:t>8</a:t>
             </a:r>
@@ -10835,9 +10835,9 @@
                 <a:solidFill>
                   <a:srgbClr val="7A869C"/>
                 </a:solidFill>
-                <a:latin typeface="나눔고딕코딩"/>
-                <a:ea typeface="나눔고딕코딩"/>
-                <a:cs typeface="나눔고딕코딩"/>
+                <a:latin typeface="D2Coding"/>
+                <a:ea typeface="D2Coding"/>
+                <a:cs typeface="D2Coding"/>
               </a:rPr>
               <a:t>9</a:t>
             </a:r>
@@ -10853,9 +10853,9 @@
                 <a:solidFill>
                   <a:srgbClr val="7A869C"/>
                 </a:solidFill>
-                <a:latin typeface="나눔고딕코딩"/>
-                <a:ea typeface="나눔고딕코딩"/>
-                <a:cs typeface="나눔고딕코딩"/>
+                <a:latin typeface="D2Coding"/>
+                <a:ea typeface="D2Coding"/>
+                <a:cs typeface="D2Coding"/>
               </a:rPr>
               <a:t>10</a:t>
             </a:r>
@@ -10871,9 +10871,9 @@
                 <a:solidFill>
                   <a:srgbClr val="7A869C"/>
                 </a:solidFill>
-                <a:latin typeface="나눔고딕코딩"/>
-                <a:ea typeface="나눔고딕코딩"/>
-                <a:cs typeface="나눔고딕코딩"/>
+                <a:latin typeface="D2Coding"/>
+                <a:ea typeface="D2Coding"/>
+                <a:cs typeface="D2Coding"/>
               </a:rPr>
               <a:t>11</a:t>
             </a:r>
@@ -22667,9 +22667,9 @@
                 <a:solidFill>
                   <a:srgbClr val="7A869C"/>
                 </a:solidFill>
-                <a:latin typeface="나눔고딕코딩"/>
-                <a:ea typeface="나눔고딕코딩"/>
-                <a:cs typeface="나눔고딕코딩"/>
+                <a:latin typeface="D2Coding"/>
+                <a:ea typeface="D2Coding"/>
+                <a:cs typeface="D2Coding"/>
               </a:rPr>
               <a:t>1</a:t>
             </a:r>
@@ -22685,9 +22685,9 @@
                 <a:solidFill>
                   <a:srgbClr val="7A869C"/>
                 </a:solidFill>
-                <a:latin typeface="나눔고딕코딩"/>
-                <a:ea typeface="나눔고딕코딩"/>
-                <a:cs typeface="나눔고딕코딩"/>
+                <a:latin typeface="D2Coding"/>
+                <a:ea typeface="D2Coding"/>
+                <a:cs typeface="D2Coding"/>
               </a:rPr>
               <a:t>2</a:t>
             </a:r>
@@ -22703,9 +22703,9 @@
                 <a:solidFill>
                   <a:srgbClr val="7A869C"/>
                 </a:solidFill>
-                <a:latin typeface="나눔고딕코딩"/>
-                <a:ea typeface="나눔고딕코딩"/>
-                <a:cs typeface="나눔고딕코딩"/>
+                <a:latin typeface="D2Coding"/>
+                <a:ea typeface="D2Coding"/>
+                <a:cs typeface="D2Coding"/>
               </a:rPr>
               <a:t>3</a:t>
             </a:r>
@@ -22721,9 +22721,9 @@
                 <a:solidFill>
                   <a:srgbClr val="7A869C"/>
                 </a:solidFill>
-                <a:latin typeface="나눔고딕코딩"/>
-                <a:ea typeface="나눔고딕코딩"/>
-                <a:cs typeface="나눔고딕코딩"/>
+                <a:latin typeface="D2Coding"/>
+                <a:ea typeface="D2Coding"/>
+                <a:cs typeface="D2Coding"/>
               </a:rPr>
               <a:t>4</a:t>
             </a:r>
@@ -22739,9 +22739,9 @@
                 <a:solidFill>
                   <a:srgbClr val="7A869C"/>
                 </a:solidFill>
-                <a:latin typeface="나눔고딕코딩"/>
-                <a:ea typeface="나눔고딕코딩"/>
-                <a:cs typeface="나눔고딕코딩"/>
+                <a:latin typeface="D2Coding"/>
+                <a:ea typeface="D2Coding"/>
+                <a:cs typeface="D2Coding"/>
               </a:rPr>
               <a:t>5</a:t>
             </a:r>
@@ -22757,9 +22757,9 @@
                 <a:solidFill>
                   <a:srgbClr val="7A869C"/>
                 </a:solidFill>
-                <a:latin typeface="나눔고딕코딩"/>
-                <a:ea typeface="나눔고딕코딩"/>
-                <a:cs typeface="나눔고딕코딩"/>
+                <a:latin typeface="D2Coding"/>
+                <a:ea typeface="D2Coding"/>
+                <a:cs typeface="D2Coding"/>
               </a:rPr>
               <a:t>6</a:t>
             </a:r>
@@ -22775,9 +22775,9 @@
                 <a:solidFill>
                   <a:srgbClr val="7A869C"/>
                 </a:solidFill>
-                <a:latin typeface="나눔고딕코딩"/>
-                <a:ea typeface="나눔고딕코딩"/>
-                <a:cs typeface="나눔고딕코딩"/>
+                <a:latin typeface="D2Coding"/>
+                <a:ea typeface="D2Coding"/>
+                <a:cs typeface="D2Coding"/>
               </a:rPr>
               <a:t>7</a:t>
             </a:r>
@@ -22793,9 +22793,9 @@
                 <a:solidFill>
                   <a:srgbClr val="7A869C"/>
                 </a:solidFill>
-                <a:latin typeface="나눔고딕코딩"/>
-                <a:ea typeface="나눔고딕코딩"/>
-                <a:cs typeface="나눔고딕코딩"/>
+                <a:latin typeface="D2Coding"/>
+                <a:ea typeface="D2Coding"/>
+                <a:cs typeface="D2Coding"/>
               </a:rPr>
               <a:t>8</a:t>
             </a:r>
@@ -22811,9 +22811,9 @@
                 <a:solidFill>
                   <a:srgbClr val="7A869C"/>
                 </a:solidFill>
-                <a:latin typeface="나눔고딕코딩"/>
-                <a:ea typeface="나눔고딕코딩"/>
-                <a:cs typeface="나눔고딕코딩"/>
+                <a:latin typeface="D2Coding"/>
+                <a:ea typeface="D2Coding"/>
+                <a:cs typeface="D2Coding"/>
               </a:rPr>
               <a:t>9</a:t>
             </a:r>
@@ -22829,9 +22829,9 @@
                 <a:solidFill>
                   <a:srgbClr val="7A869C"/>
                 </a:solidFill>
-                <a:latin typeface="나눔고딕코딩"/>
-                <a:ea typeface="나눔고딕코딩"/>
-                <a:cs typeface="나눔고딕코딩"/>
+                <a:latin typeface="D2Coding"/>
+                <a:ea typeface="D2Coding"/>
+                <a:cs typeface="D2Coding"/>
               </a:rPr>
               <a:t>10</a:t>
             </a:r>
@@ -22847,9 +22847,9 @@
                 <a:solidFill>
                   <a:srgbClr val="7A869C"/>
                 </a:solidFill>
-                <a:latin typeface="나눔고딕코딩"/>
-                <a:ea typeface="나눔고딕코딩"/>
-                <a:cs typeface="나눔고딕코딩"/>
+                <a:latin typeface="D2Coding"/>
+                <a:ea typeface="D2Coding"/>
+                <a:cs typeface="D2Coding"/>
               </a:rPr>
               <a:t>11</a:t>
             </a:r>
@@ -22865,9 +22865,9 @@
                 <a:solidFill>
                   <a:srgbClr val="7A869C"/>
                 </a:solidFill>
-                <a:latin typeface="나눔고딕코딩"/>
-                <a:ea typeface="나눔고딕코딩"/>
-                <a:cs typeface="나눔고딕코딩"/>
+                <a:latin typeface="D2Coding"/>
+                <a:ea typeface="D2Coding"/>
+                <a:cs typeface="D2Coding"/>
               </a:rPr>
               <a:t>12</a:t>
             </a:r>
@@ -22906,9 +22906,9 @@
                 <a:solidFill>
                   <a:srgbClr val="E6EAF2"/>
                 </a:solidFill>
-                <a:latin typeface="나눔고딕코딩"/>
-                <a:ea typeface="나눔고딕코딩"/>
-                <a:cs typeface="나눔고딕코딩"/>
+                <a:latin typeface="D2Coding"/>
+                <a:ea typeface="D2Coding"/>
+                <a:cs typeface="D2Coding"/>
               </a:rPr>
               <a:t>customers</a:t>
             </a:r>
@@ -22924,9 +22924,9 @@
                 <a:solidFill>
                   <a:srgbClr val="E6EAF2"/>
                 </a:solidFill>
-                <a:latin typeface="나눔고딕코딩"/>
-                <a:ea typeface="나눔고딕코딩"/>
-                <a:cs typeface="나눔고딕코딩"/>
+                <a:latin typeface="D2Coding"/>
+                <a:ea typeface="D2Coding"/>
+                <a:cs typeface="D2Coding"/>
               </a:rPr>
               <a:t>+---------+--------+--------+------+-------------------+-------------+--------+</a:t>
             </a:r>
@@ -22942,9 +22942,9 @@
                 <a:solidFill>
                   <a:srgbClr val="E6EAF2"/>
                 </a:solidFill>
-                <a:latin typeface="나눔고딕코딩"/>
-                <a:ea typeface="나눔고딕코딩"/>
-                <a:cs typeface="나눔고딕코딩"/>
+                <a:latin typeface="D2Coding"/>
+                <a:ea typeface="D2Coding"/>
+                <a:cs typeface="D2Coding"/>
               </a:rPr>
               <a:t>| cust_id | name   | grade  | city | email             | joined_date | points |  ← 열(속성) 7개 = 차수 7</a:t>
             </a:r>
@@ -22960,9 +22960,9 @@
                 <a:solidFill>
                   <a:srgbClr val="E6EAF2"/>
                 </a:solidFill>
-                <a:latin typeface="나눔고딕코딩"/>
-                <a:ea typeface="나눔고딕코딩"/>
-                <a:cs typeface="나눔고딕코딩"/>
+                <a:latin typeface="D2Coding"/>
+                <a:ea typeface="D2Coding"/>
+                <a:cs typeface="D2Coding"/>
               </a:rPr>
               <a:t>+---------+--------+--------+------+-------------------+-------------+--------+</a:t>
             </a:r>
@@ -22978,9 +22978,9 @@
                 <a:solidFill>
                   <a:srgbClr val="E6EAF2"/>
                 </a:solidFill>
-                <a:latin typeface="나눔고딕코딩"/>
-                <a:ea typeface="나눔고딕코딩"/>
-                <a:cs typeface="나눔고딕코딩"/>
+                <a:latin typeface="D2Coding"/>
+                <a:ea typeface="D2Coding"/>
+                <a:cs typeface="D2Coding"/>
               </a:rPr>
               <a:t>| C001    | 한가람 | VIP    | 서울 | garam@example.com | 2024-03-12  |   4500 |  ← 행(튜플) 하나 = 고객 한 명</a:t>
             </a:r>
@@ -22996,9 +22996,9 @@
                 <a:solidFill>
                   <a:srgbClr val="E6EAF2"/>
                 </a:solidFill>
-                <a:latin typeface="나눔고딕코딩"/>
-                <a:ea typeface="나눔고딕코딩"/>
-                <a:cs typeface="나눔고딕코딩"/>
+                <a:latin typeface="D2Coding"/>
+                <a:ea typeface="D2Coding"/>
+                <a:cs typeface="D2Coding"/>
               </a:rPr>
               <a:t>| C005    | 박서연 | SILVER | 광주 | NULL              | 2025-04-17  |    300 |</a:t>
             </a:r>
@@ -23014,9 +23014,9 @@
                 <a:solidFill>
                   <a:srgbClr val="E6EAF2"/>
                 </a:solidFill>
-                <a:latin typeface="나눔고딕코딩"/>
-                <a:ea typeface="나눔고딕코딩"/>
-                <a:cs typeface="나눔고딕코딩"/>
+                <a:latin typeface="D2Coding"/>
+                <a:ea typeface="D2Coding"/>
+                <a:cs typeface="D2Coding"/>
               </a:rPr>
               <a:t>| C010    | 서지안 | SILVER | 대전 | jian@example.com  | 2026-03-01  |      0 |</a:t>
             </a:r>
@@ -23032,9 +23032,9 @@
                 <a:solidFill>
                   <a:srgbClr val="E6EAF2"/>
                 </a:solidFill>
-                <a:latin typeface="나눔고딕코딩"/>
-                <a:ea typeface="나눔고딕코딩"/>
-                <a:cs typeface="나눔고딕코딩"/>
+                <a:latin typeface="D2Coding"/>
+                <a:ea typeface="D2Coding"/>
+                <a:cs typeface="D2Coding"/>
               </a:rPr>
               <a:t>+---------+--------+--------+------+-------------------+-------------+--------+</a:t>
             </a:r>
@@ -23050,9 +23050,9 @@
                 <a:solidFill>
                   <a:srgbClr val="E6EAF2"/>
                 </a:solidFill>
-                <a:latin typeface="나눔고딕코딩"/>
-                <a:ea typeface="나눔고딕코딩"/>
-                <a:cs typeface="나눔고딕코딩"/>
+                <a:latin typeface="D2Coding"/>
+                <a:ea typeface="D2Coding"/>
+                <a:cs typeface="D2Coding"/>
               </a:rPr>
               <a:t>(전체 데이터는 고객 10명 → 카디널리티 10)</a:t>
             </a:r>
@@ -23068,9 +23068,9 @@
                 <a:solidFill>
                   <a:srgbClr val="E6EAF2"/>
                 </a:solidFill>
-                <a:latin typeface="나눔고딕코딩"/>
-                <a:ea typeface="나눔고딕코딩"/>
-                <a:cs typeface="나눔고딕코딩"/>
+                <a:latin typeface="D2Coding"/>
+                <a:ea typeface="D2Coding"/>
+                <a:cs typeface="D2Coding"/>
               </a:rPr>
               <a:t/>
             </a:r>
@@ -23086,9 +23086,9 @@
                 <a:solidFill>
                   <a:srgbClr val="E6EAF2"/>
                 </a:solidFill>
-                <a:latin typeface="나눔고딕코딩"/>
-                <a:ea typeface="나눔고딕코딩"/>
-                <a:cs typeface="나눔고딕코딩"/>
+                <a:latin typeface="D2Coding"/>
+                <a:ea typeface="D2Coding"/>
+                <a:cs typeface="D2Coding"/>
               </a:rPr>
               <a:t>도메인(grade)  = { 'VIP', 'GOLD', 'SILVER' }</a:t>
             </a:r>
@@ -23104,9 +23104,9 @@
                 <a:solidFill>
                   <a:srgbClr val="E6EAF2"/>
                 </a:solidFill>
-                <a:latin typeface="나눔고딕코딩"/>
-                <a:ea typeface="나눔고딕코딩"/>
-                <a:cs typeface="나눔고딕코딩"/>
+                <a:latin typeface="D2Coding"/>
+                <a:ea typeface="D2Coding"/>
+                <a:cs typeface="D2Coding"/>
               </a:rPr>
               <a:t>도메인(points) = 0 이상의 정수</a:t>
             </a:r>
@@ -27966,9 +27966,9 @@
                 <a:solidFill>
                   <a:srgbClr val="7A869C"/>
                 </a:solidFill>
-                <a:latin typeface="나눔고딕코딩"/>
-                <a:ea typeface="나눔고딕코딩"/>
-                <a:cs typeface="나눔고딕코딩"/>
+                <a:latin typeface="D2Coding"/>
+                <a:ea typeface="D2Coding"/>
+                <a:cs typeface="D2Coding"/>
               </a:rPr>
               <a:t>1</a:t>
             </a:r>
@@ -27984,9 +27984,9 @@
                 <a:solidFill>
                   <a:srgbClr val="7A869C"/>
                 </a:solidFill>
-                <a:latin typeface="나눔고딕코딩"/>
-                <a:ea typeface="나눔고딕코딩"/>
-                <a:cs typeface="나눔고딕코딩"/>
+                <a:latin typeface="D2Coding"/>
+                <a:ea typeface="D2Coding"/>
+                <a:cs typeface="D2Coding"/>
               </a:rPr>
               <a:t>2</a:t>
             </a:r>
@@ -28002,9 +28002,9 @@
                 <a:solidFill>
                   <a:srgbClr val="7A869C"/>
                 </a:solidFill>
-                <a:latin typeface="나눔고딕코딩"/>
-                <a:ea typeface="나눔고딕코딩"/>
-                <a:cs typeface="나눔고딕코딩"/>
+                <a:latin typeface="D2Coding"/>
+                <a:ea typeface="D2Coding"/>
+                <a:cs typeface="D2Coding"/>
               </a:rPr>
               <a:t>3</a:t>
             </a:r>
@@ -28020,9 +28020,9 @@
                 <a:solidFill>
                   <a:srgbClr val="7A869C"/>
                 </a:solidFill>
-                <a:latin typeface="나눔고딕코딩"/>
-                <a:ea typeface="나눔고딕코딩"/>
-                <a:cs typeface="나눔고딕코딩"/>
+                <a:latin typeface="D2Coding"/>
+                <a:ea typeface="D2Coding"/>
+                <a:cs typeface="D2Coding"/>
               </a:rPr>
               <a:t>4</a:t>
             </a:r>
@@ -28038,9 +28038,9 @@
                 <a:solidFill>
                   <a:srgbClr val="7A869C"/>
                 </a:solidFill>
-                <a:latin typeface="나눔고딕코딩"/>
-                <a:ea typeface="나눔고딕코딩"/>
-                <a:cs typeface="나눔고딕코딩"/>
+                <a:latin typeface="D2Coding"/>
+                <a:ea typeface="D2Coding"/>
+                <a:cs typeface="D2Coding"/>
               </a:rPr>
               <a:t>5</a:t>
             </a:r>
@@ -28056,9 +28056,9 @@
                 <a:solidFill>
                   <a:srgbClr val="7A869C"/>
                 </a:solidFill>
-                <a:latin typeface="나눔고딕코딩"/>
-                <a:ea typeface="나눔고딕코딩"/>
-                <a:cs typeface="나눔고딕코딩"/>
+                <a:latin typeface="D2Coding"/>
+                <a:ea typeface="D2Coding"/>
+                <a:cs typeface="D2Coding"/>
               </a:rPr>
               <a:t>6</a:t>
             </a:r>
@@ -28074,9 +28074,9 @@
                 <a:solidFill>
                   <a:srgbClr val="7A869C"/>
                 </a:solidFill>
-                <a:latin typeface="나눔고딕코딩"/>
-                <a:ea typeface="나눔고딕코딩"/>
-                <a:cs typeface="나눔고딕코딩"/>
+                <a:latin typeface="D2Coding"/>
+                <a:ea typeface="D2Coding"/>
+                <a:cs typeface="D2Coding"/>
               </a:rPr>
               <a:t>7</a:t>
             </a:r>
@@ -28092,9 +28092,9 @@
                 <a:solidFill>
                   <a:srgbClr val="7A869C"/>
                 </a:solidFill>
-                <a:latin typeface="나눔고딕코딩"/>
-                <a:ea typeface="나눔고딕코딩"/>
-                <a:cs typeface="나눔고딕코딩"/>
+                <a:latin typeface="D2Coding"/>
+                <a:ea typeface="D2Coding"/>
+                <a:cs typeface="D2Coding"/>
               </a:rPr>
               <a:t>8</a:t>
             </a:r>
@@ -28110,9 +28110,9 @@
                 <a:solidFill>
                   <a:srgbClr val="7A869C"/>
                 </a:solidFill>
-                <a:latin typeface="나눔고딕코딩"/>
-                <a:ea typeface="나눔고딕코딩"/>
-                <a:cs typeface="나눔고딕코딩"/>
+                <a:latin typeface="D2Coding"/>
+                <a:ea typeface="D2Coding"/>
+                <a:cs typeface="D2Coding"/>
               </a:rPr>
               <a:t>9</a:t>
             </a:r>
@@ -28151,9 +28151,9 @@
                 <a:solidFill>
                   <a:srgbClr val="E6EAF2"/>
                 </a:solidFill>
-                <a:latin typeface="나눔고딕코딩"/>
-                <a:ea typeface="나눔고딕코딩"/>
-                <a:cs typeface="나눔고딕코딩"/>
+                <a:latin typeface="D2Coding"/>
+                <a:ea typeface="D2Coding"/>
+                <a:cs typeface="D2Coding"/>
               </a:rPr>
               <a:t>customers(cust_id, name, grade, city, email, joined_date, points)</a:t>
             </a:r>
@@ -28169,9 +28169,9 @@
                 <a:solidFill>
                   <a:srgbClr val="E6EAF2"/>
                 </a:solidFill>
-                <a:latin typeface="나눔고딕코딩"/>
-                <a:ea typeface="나눔고딕코딩"/>
-                <a:cs typeface="나눔고딕코딩"/>
+                <a:latin typeface="D2Coding"/>
+                <a:ea typeface="D2Coding"/>
+                <a:cs typeface="D2Coding"/>
               </a:rPr>
               <a:t>  · 고객번호(cust_id)는 고객마다 유일</a:t>
             </a:r>
@@ -28187,9 +28187,9 @@
                 <a:solidFill>
                   <a:srgbClr val="E6EAF2"/>
                 </a:solidFill>
-                <a:latin typeface="나눔고딕코딩"/>
-                <a:ea typeface="나눔고딕코딩"/>
-                <a:cs typeface="나눔고딕코딩"/>
+                <a:latin typeface="D2Coding"/>
+                <a:ea typeface="D2Coding"/>
+                <a:cs typeface="D2Coding"/>
               </a:rPr>
               <a:t>  · 이메일(email)도 UNIQUE 제약으로 중복 불가</a:t>
             </a:r>
@@ -28205,9 +28205,9 @@
                 <a:solidFill>
                   <a:srgbClr val="E6EAF2"/>
                 </a:solidFill>
-                <a:latin typeface="나눔고딕코딩"/>
-                <a:ea typeface="나눔고딕코딩"/>
-                <a:cs typeface="나눔고딕코딩"/>
+                <a:latin typeface="D2Coding"/>
+                <a:ea typeface="D2Coding"/>
+                <a:cs typeface="D2Coding"/>
               </a:rPr>
               <a:t>  · 이름(name)은 동명이인이 있을 수 있음</a:t>
             </a:r>
@@ -28223,9 +28223,9 @@
                 <a:solidFill>
                   <a:srgbClr val="E6EAF2"/>
                 </a:solidFill>
-                <a:latin typeface="나눔고딕코딩"/>
-                <a:ea typeface="나눔고딕코딩"/>
-                <a:cs typeface="나눔고딕코딩"/>
+                <a:latin typeface="D2Coding"/>
+                <a:ea typeface="D2Coding"/>
+                <a:cs typeface="D2Coding"/>
               </a:rPr>
               <a:t/>
             </a:r>
@@ -28241,9 +28241,9 @@
                 <a:solidFill>
                   <a:srgbClr val="E6EAF2"/>
                 </a:solidFill>
-                <a:latin typeface="나눔고딕코딩"/>
-                <a:ea typeface="나눔고딕코딩"/>
-                <a:cs typeface="나눔고딕코딩"/>
+                <a:latin typeface="D2Coding"/>
+                <a:ea typeface="D2Coding"/>
+                <a:cs typeface="D2Coding"/>
               </a:rPr>
               <a:t>슈퍼키   : (cust_id), (email), (cust_id, name), (email, city) ...</a:t>
             </a:r>
@@ -28259,9 +28259,9 @@
                 <a:solidFill>
                   <a:srgbClr val="E6EAF2"/>
                 </a:solidFill>
-                <a:latin typeface="나눔고딕코딩"/>
-                <a:ea typeface="나눔고딕코딩"/>
-                <a:cs typeface="나눔고딕코딩"/>
+                <a:latin typeface="D2Coding"/>
+                <a:ea typeface="D2Coding"/>
+                <a:cs typeface="D2Coding"/>
               </a:rPr>
               <a:t>후보키   : cust_id, email               ← 유일성 + 최소성</a:t>
             </a:r>
@@ -28277,9 +28277,9 @@
                 <a:solidFill>
                   <a:srgbClr val="E6EAF2"/>
                 </a:solidFill>
-                <a:latin typeface="나눔고딕코딩"/>
-                <a:ea typeface="나눔고딕코딩"/>
-                <a:cs typeface="나눔고딕코딩"/>
+                <a:latin typeface="D2Coding"/>
+                <a:ea typeface="D2Coding"/>
+                <a:cs typeface="D2Coding"/>
               </a:rPr>
               <a:t>기본키   : cust_id                      ← 후보키 중 대표로 선정</a:t>
             </a:r>
@@ -28295,9 +28295,9 @@
                 <a:solidFill>
                   <a:srgbClr val="E6EAF2"/>
                 </a:solidFill>
-                <a:latin typeface="나눔고딕코딩"/>
-                <a:ea typeface="나눔고딕코딩"/>
-                <a:cs typeface="나눔고딕코딩"/>
+                <a:latin typeface="D2Coding"/>
+                <a:ea typeface="D2Coding"/>
+                <a:cs typeface="D2Coding"/>
               </a:rPr>
               <a:t>대체키   : email                        ← 선정되지 않은 후보키</a:t>
             </a:r>
